--- a/docs/office_hour_talk/promptkit-office-hour.pptx
+++ b/docs/office_hour_talk/promptkit-office-hour.pptx
@@ -10721,7 +10721,7 @@
                 </a:solidFill>
                 <a:latin typeface="Segoe UI"/>
               </a:rPr>
-              <a:t>       copilot -i "Read and execute bootstrap.md"</a:t>
+              <a:t>       copilot   # /promptkit skill activates automatically</a:t>
             </a:r>
           </a:p>
           <a:p>
